--- a/dist/초3/수학/분수와소수/초3_수학_분수와소수_03_소수의뜻.pptx
+++ b/dist/초3/수학/분수와소수/초3_수학_분수와소수_03_소수의뜻.pptx
@@ -121,13 +121,13 @@
   <p:extLst>
     <p:ext uri="{521415D9-36F7-43E2-AB2F-B90AF26B5E84}">
       <p14:sectionLst xmlns:p14="http://schemas.microsoft.com/office/powerpoint/2010/main">
-        <p14:section name="도입" id="{5710751a-d425-67a9-3886-780b993d06f5}">
+        <p14:section name="도입" id="{df6fd655-8478-c132-321c-6f83767a9d1c}">
           <p14:sldIdLst>
             <p14:sldId id="256"/>
             <p14:sldId id="257"/>
           </p14:sldIdLst>
         </p14:section>
-        <p14:section name="개념" id="{cae3760c-5bed-cf42-5ffb-f399c1b8c940}">
+        <p14:section name="개념" id="{7511289c-14f4-cc46-510f-3f496b58fbf7}">
           <p14:sldIdLst>
             <p14:sldId id="258"/>
             <p14:sldId id="259"/>
@@ -135,7 +135,7 @@
             <p14:sldId id="263"/>
           </p14:sldIdLst>
         </p14:section>
-        <p14:section name="연습" id="{9f4613c7-7b12-985d-687b-5718a653b2e3}">
+        <p14:section name="연습" id="{cecb710d-042a-c082-b615-7344ff8dd278}">
           <p14:sldIdLst>
             <p14:sldId id="260"/>
             <p14:sldId id="262"/>
@@ -143,31 +143,31 @@
             <p14:sldId id="265"/>
           </p14:sldIdLst>
         </p14:section>
-        <p14:section name="개념" id="{308265bc-d750-e0f5-a8a9-f0f058f72c1a}">
+        <p14:section name="개념" id="{ed06219d-2faa-613f-79e5-2a58beb000e4}">
           <p14:sldIdLst/>
         </p14:section>
-        <p14:section name="연습" id="{f0fba926-1f31-1c6f-fa3c-8128ea77d297}">
+        <p14:section name="연습" id="{f7ff80be-b260-71ac-a635-e98f406c2046}">
           <p14:sldIdLst/>
         </p14:section>
-        <p14:section name="개념" id="{f45186eb-efa3-d2e9-13db-964049c407d2}">
+        <p14:section name="개념" id="{12506628-5c55-55f6-e1f7-bed77f9ef505}">
           <p14:sldIdLst/>
         </p14:section>
-        <p14:section name="연습" id="{e40797db-a105-a0df-17c5-96bde81577eb}">
+        <p14:section name="연습" id="{9bfa22f4-7630-b712-1c89-ab3236152104}">
           <p14:sldIdLst/>
         </p14:section>
-        <p14:section name="확인" id="{169d8e72-4e0a-a899-79a1-28044bd10d35}">
+        <p14:section name="확인" id="{e524dc31-cfeb-494d-d3e9-15b46366ba28}">
           <p14:sldIdLst>
             <p14:sldId id="266"/>
             <p14:sldId id="267"/>
             <p14:sldId id="268"/>
           </p14:sldIdLst>
         </p14:section>
-        <p14:section name="정리" id="{9a378aa4-b279-3b93-4ad5-f16bd12b4a0f}">
+        <p14:section name="정리" id="{64c49c99-d2e3-e221-7fb2-2a3a817fcd95}">
           <p14:sldIdLst>
             <p14:sldId id="269"/>
           </p14:sldIdLst>
         </p14:section>
-        <p14:section name="보충" id="{0c558b3e-f1b6-ee00-f3f0-e30adc273328}">
+        <p14:section name="보충" id="{c96bf0b0-d0db-164b-e7db-5015d3a0a97a}">
           <p14:sldIdLst>
             <p14:sldId id="270"/>
           </p14:sldIdLst>
@@ -4958,7 +4958,7 @@
               <a:buNone/>
             </a:pPr>
             <a:r>
-              <a:rPr lang="ko-KR" altLang="en-US" sz="3000" dirty="0">
+              <a:rPr lang="en-US" altLang="ko-KR" sz="3000" dirty="0">
                 <a:solidFill>
                   <a:srgbClr val="1F2937"/>
                 </a:solidFill>
@@ -5036,7 +5036,7 @@
               <a:buNone/>
             </a:pPr>
             <a:r>
-              <a:rPr lang="ko-KR" altLang="en-US" sz="3000" dirty="0">
+              <a:rPr lang="en-US" altLang="ko-KR" sz="3000" dirty="0">
                 <a:solidFill>
                   <a:srgbClr val="1F2937"/>
                 </a:solidFill>
@@ -5239,7 +5239,7 @@
               <a:buNone/>
             </a:pPr>
             <a:r>
-              <a:rPr lang="ko-KR" altLang="en-US" sz="3000" dirty="0">
+              <a:rPr lang="en-US" altLang="ko-KR" sz="3000" dirty="0">
                 <a:solidFill>
                   <a:srgbClr val="1F2937"/>
                 </a:solidFill>
@@ -13119,7 +13119,7 @@
               <a:buNone/>
             </a:pPr>
             <a:r>
-              <a:rPr lang="ko-KR" altLang="en-US" sz="3000" b="1" dirty="0">
+              <a:rPr lang="en-US" altLang="ko-KR" sz="3000" b="1" dirty="0">
                 <a:solidFill>
                   <a:srgbClr val="1F2937"/>
                 </a:solidFill>
